--- a/docs/sunum/on-degerlendirme.pptx
+++ b/docs/sunum/on-degerlendirme.pptx
@@ -592,27 +592,32 @@
           <a:lstStyle/>
           <a:p>
             <a:r>
-              <a:t>Konuşma notu (50 sn): "Kapatırken en önemli şeyi söyleyeyim: dürüstüz. Gösterdiğimiz</a:t>
-            </a:r>
-          </a:p>
-          <a:p>
-            <a:r>
-              <a:t>skorlar mock taban — yani LLM yerine kural-tabanlı fallback. Bunu özellikle vurguluyoruz çünkü</a:t>
-            </a:r>
-          </a:p>
-          <a:p>
-            <a:r>
-              <a:t>in-domain'de 0.92 görünen sınıflandırma, held-out'ta 0.22'ye düşüyor; bu, kural tabanının</a:t>
-            </a:r>
-          </a:p>
-          <a:p>
-            <a:r>
-              <a:t>genellemediğini dürüstçe gösteriyor. Asıl değer gerçek-LLM modunda ve few-shot prompt'umuz</a:t>
-            </a:r>
-          </a:p>
-          <a:p>
-            <a:r>
-              <a:t>hazır. Pipeline her iki modda da aynı — değişen sadece kalite. Teşekkürler, sorularınızı bekliyoruz."</a:t>
+              <a:t>Konuşma notu (50 sn): "Kapatırken en önemli şeyi söyleyeyim: dürüstüz ve artık ölçtük.</a:t>
+            </a:r>
+          </a:p>
+          <a:p>
+            <a:r>
+              <a:t>Yayınladığımız mock karne anahtarsız tabandır. Gerçek değeri kasıtlı zor — örtük ifadeli, farklı</a:t>
+            </a:r>
+          </a:p>
+          <a:p>
+            <a:r>
+              <a:t>sözlükle yazılmış — bir held-out sette ölçtük: mock 0.22'den gpt-4o-mini'de 0.61'e, gpt-4o'da</a:t>
+            </a:r>
+          </a:p>
+          <a:p>
+            <a:r>
+              <a:t>0.91 sıkı macro-F1'e çıkıyor; operasyonel doğruluk 0.93, doğru birime yönlendirme 0.93 (108'de 98).</a:t>
+            </a:r>
+          </a:p>
+          <a:p>
+            <a:r>
+              <a:t>Bu, dış değerlendirmenin 'doğruluk gerçekçi mi' çekincesine kesin yanıt: ilerleme dairesel değil,</a:t>
+            </a:r>
+          </a:p>
+          <a:p>
+            <a:r>
+              <a:t>aynı zor sette ölçülmüş. Pipeline her modda aynı — değişen sadece kalite. Teşekkürler."</a:t>
             </a:r>
           </a:p>
         </p:txBody>
@@ -1275,6 +1280,11 @@
         <p:txBody>
           <a:bodyPr/>
           <a:lstStyle/>
+          <a:p>
+            <a:r>
+              <a:t>Detaylı ticarileşme/ölçeklenebilirlik anlatımı (şartname "Ticarileşme Potansiyeli 15p"): docs/ticarileşme.md.</a:t>
+            </a:r>
+          </a:p>
           <a:p>
             <a:r>
               <a:t>Konuşma notu (45 sn): "Yeniliğimiz hem mimaride hem üründe. Çok-ajan kurgunun değerini</a:t>
@@ -4409,31 +4419,31 @@
           <a:p>
             <a:pPr/>
             <a:r>
-              <a:t>Hazır: Görev 1 (6/6) + Görev 2 (5/5) uçtan-uca çalışıyor; 210 test; CI; güvenlik denetimi (0 CRITICAL).</a:t>
+              <a:t>Hazır: Görev 1 (6/6) + Görev 2 (5/5) uçtan-uca çalışıyor; 649 test; CI; güvenlik denetimi (0 CRITICAL).</a:t>
             </a:r>
           </a:p>
           <a:p>
             <a:pPr/>
             <a:r>
-              <a:t>Dürüst skor beyanı: Yayınlanan karne LLM_MODE=mock tabandır. Gerçek-LLM modu yükseltir.</a:t>
+              <a:t>Dürüst skor beyanı (ÖLÇÜLDÜ): İlerleme mock 0.22 → gpt-4o-mini 0.61 → gpt-4o 0.91</a:t>
             </a:r>
           </a:p>
           <a:p>
             <a:pPr/>
             <a:r>
-              <a:t>In-domain mock macro-F1 0.92; held-out (dairesel-olmayan) 0.22 → mock heuristik genellemiyor;</a:t>
+              <a:t>(sıkı macro-F1), hepsi dairesel-olmayan held-out sette (örtük ifadeli, farklı sözlük). gpt-4o:</a:t>
             </a:r>
           </a:p>
           <a:p>
             <a:pPr/>
             <a:r>
-              <a:t>gerçek değer few-shot LLM modunda (prompt hazır, anahtar verilince ölçülür).</a:t>
+              <a:t>operasyonel 0.93 / yönlendirme Top-1 0.93 (98/108). Mock = anahtarsız taban (CI/offline), tavan değil.</a:t>
             </a:r>
           </a:p>
           <a:p>
             <a:pPr/>
             <a:r>
-              <a:t>Sonraki adım (finalist olunursa): gerçek-LLM ölçümü, blind insan-etiketli gold, ablasyon genişletme, canlı OCR.</a:t>
+              <a:t>Sonraki adım (finalist olunursa): 2. held-out set ile çapraz-doğrulama, blind insan-etiketli gold, ablasyon genişletme, canlı OCR.</a:t>
             </a:r>
           </a:p>
         </p:txBody>
@@ -4523,6 +4533,30 @@
           </a:p>
         </p:txBody>
       </p:sp>
+      <p:pic>
+        <p:nvPicPr>
+          <p:cNvPr id="4" name="Picture 3" descr="demo.gif"/>
+          <p:cNvPicPr>
+            <a:picLocks noChangeAspect="1"/>
+          </p:cNvPicPr>
+          <p:nvPr/>
+        </p:nvPicPr>
+        <p:blipFill>
+          <a:blip r:embed="rId2"/>
+          <a:stretch>
+            <a:fillRect/>
+          </a:stretch>
+        </p:blipFill>
+        <p:spPr>
+          <a:xfrm>
+            <a:off x="5029200" y="2057400"/>
+            <a:ext cx="3840480" cy="4403750"/>
+          </a:xfrm>
+          <a:prstGeom prst="rect">
+            <a:avLst/>
+          </a:prstGeom>
+        </p:spPr>
+      </p:pic>
     </p:spTree>
   </p:cSld>
   <p:clrMapOvr>
@@ -5408,7 +5442,13 @@
           <a:p>
             <a:pPr/>
             <a:r>
-              <a:t>Ticarileşme / ölçeklenebilirlik: lisans-temiz MIT yığın (AGPL yok); modlar arası taşınabilir (mock/bulut/lokal); kamu kurumuna kurum-içi (offline) konuşlandırılabilir → gizlilik avantajı.</a:t>
+              <a:t>Hedef kullanıcı + değer: kamu kurumları / EBYS-DYS operatörleri → evrak işleme süresi↓, sınıflandırma/havale hatası↓, resmî-format standardı.</a:t>
+            </a:r>
+          </a:p>
+          <a:p>
+            <a:pPr/>
+            <a:r>
+              <a:t>Ticarileşme / ölçeklenebilirlik: lisans-temiz MIT yığın (AGPL yok); EBYS/e-Yazışma API entegrasyonu; çok-kurum SaaS veya kurum-içi (on-prem, offline, KVKK) konuşlandırma; iş modeli lisans/SaaS/kamu ihale.</a:t>
             </a:r>
           </a:p>
           <a:p>

--- a/docs/sunum/on-degerlendirme.pptx
+++ b/docs/sunum/on-degerlendirme.pptx
@@ -4550,7 +4550,7 @@
         <p:spPr>
           <a:xfrm>
             <a:off x="5029200" y="2057400"/>
-            <a:ext cx="3840480" cy="4403750"/>
+            <a:ext cx="3840480" cy="5257617"/>
           </a:xfrm>
           <a:prstGeom prst="rect">
             <a:avLst/>
@@ -4829,7 +4829,7 @@
         <p:spPr>
           <a:xfrm>
             <a:off x="5029200" y="2057400"/>
-            <a:ext cx="3840480" cy="1059972"/>
+            <a:ext cx="3840480" cy="5258968"/>
           </a:xfrm>
           <a:prstGeom prst="rect">
             <a:avLst/>
@@ -5004,7 +5004,7 @@
         <p:spPr>
           <a:xfrm>
             <a:off x="5029200" y="2057400"/>
-            <a:ext cx="3840480" cy="4404857"/>
+            <a:ext cx="3840480" cy="5228153"/>
           </a:xfrm>
           <a:prstGeom prst="rect">
             <a:avLst/>
